--- a/slides/11-03-tricks-that-target-people.pptx
+++ b/slides/11-03-tricks-that-target-people.pptx
@@ -3835,17 +3835,17 @@
         </p:nvSpPr>
         <p:spPr>
           <a:xfrm>
-            <a:off x="457200" y="4526280"/>
-            <a:ext cx="8229600" cy="201168"/>
-          </a:xfrm>
-          <a:prstGeom prst="rect">
-            <a:avLst/>
-          </a:prstGeom>
-          <a:noFill/>
-          <a:ln/>
-        </p:spPr>
-        <p:txBody>
-          <a:bodyPr wrap="square" lIns="0" tIns="0" rIns="0" bIns="0" rtlCol="0" anchor="ctr"/>
+            <a:off x="457200" y="4407408"/>
+            <a:ext cx="8229600" cy="329184"/>
+          </a:xfrm>
+          <a:prstGeom prst="rect">
+            <a:avLst/>
+          </a:prstGeom>
+          <a:noFill/>
+          <a:ln/>
+        </p:spPr>
+        <p:txBody>
+          <a:bodyPr wrap="square" lIns="0" tIns="0" rIns="0" bIns="0" rtlCol="0" anchor="t"/>
           <a:lstStyle/>
           <a:p>
             <a:pPr indent="0" marL="0">
@@ -3860,7 +3860,24 @@
                 <a:ea typeface="Open Sans" pitchFamily="34" charset="-122"/>
                 <a:cs typeface="Open Sans" pitchFamily="34" charset="-120"/>
               </a:rPr>
-              <a:t>© 2026 Niranga Dharmaratna. Licensed CC BY-NC-SA 4.0. Icons: Font Awesome Free (CC BY 4.0). Illustrations: original, same licence.</a:t>
+              <a:t>© 2026 Niranga Dharmaratna, School of Computing &amp; Engineering, National Institute of Business Management</a:t>
+            </a:r>
+            <a:endParaRPr lang="en-US" sz="750" dirty="0"/>
+          </a:p>
+          <a:p>
+            <a:pPr indent="0" marL="0">
+              <a:buNone/>
+            </a:pPr>
+            <a:r>
+              <a:rPr lang="en-US" sz="750" dirty="0">
+                <a:solidFill>
+                  <a:srgbClr val="A39E98"/>
+                </a:solidFill>
+                <a:latin typeface="Open Sans" pitchFamily="34" charset="0"/>
+                <a:ea typeface="Open Sans" pitchFamily="34" charset="-122"/>
+                <a:cs typeface="Open Sans" pitchFamily="34" charset="-120"/>
+              </a:rPr>
+              <a:t>Licensed CC BY-NC-SA 4.0. Icons: Font Awesome Free (CC BY 4.0). Illustrations: original, same licence.</a:t>
             </a:r>
             <a:endParaRPr lang="en-US" sz="750" dirty="0"/>
           </a:p>

--- a/slides/11-03-tricks-that-target-people.pptx
+++ b/slides/11-03-tricks-that-target-people.pptx
@@ -3627,7 +3627,7 @@
                 <a:ea typeface="Open Sans" pitchFamily="34" charset="-122"/>
                 <a:cs typeface="Open Sans" pitchFamily="34" charset="-120"/>
               </a:rPr>
-              <a:t>DBIS-11  |  Day 2  |  Session 11.3  |  9:00 to 12:00</a:t>
+              <a:t>DBIS-11  |  Day 2  |  Session 11.3</a:t>
             </a:r>
             <a:endParaRPr lang="en-US" sz="1400" dirty="0"/>
           </a:p>
@@ -3835,6 +3835,45 @@
         </p:nvSpPr>
         <p:spPr>
           <a:xfrm>
+            <a:off x="457200" y="4023360"/>
+            <a:ext cx="4937760" cy="274320"/>
+          </a:xfrm>
+          <a:prstGeom prst="rect">
+            <a:avLst/>
+          </a:prstGeom>
+          <a:noFill/>
+          <a:ln/>
+        </p:spPr>
+        <p:txBody>
+          <a:bodyPr wrap="square" lIns="0" tIns="0" rIns="0" bIns="0" rtlCol="0" anchor="ctr"/>
+          <a:lstStyle/>
+          <a:p>
+            <a:pPr indent="0" marL="0">
+              <a:buNone/>
+            </a:pPr>
+            <a:r>
+              <a:rPr lang="en-US" sz="1200" b="1" dirty="0">
+                <a:solidFill>
+                  <a:srgbClr val="C7A887"/>
+                </a:solidFill>
+                <a:latin typeface="Open Sans" pitchFamily="34" charset="0"/>
+                <a:ea typeface="Open Sans" pitchFamily="34" charset="-122"/>
+                <a:cs typeface="Open Sans" pitchFamily="34" charset="-120"/>
+              </a:rPr>
+              <a:t>Niranga Dharmaratna - niranga@nibm.lk</a:t>
+            </a:r>
+            <a:endParaRPr lang="en-US" sz="1200" dirty="0"/>
+          </a:p>
+        </p:txBody>
+      </p:sp>
+      <p:sp>
+        <p:nvSpPr>
+          <p:cNvPr id="12" name="Text 8"/>
+          <p:cNvSpPr txBox="1"/>
+          <p:nvPr/>
+        </p:nvSpPr>
+        <p:spPr>
+          <a:xfrm>
             <a:off x="457200" y="4407408"/>
             <a:ext cx="8229600" cy="329184"/>
           </a:xfrm>
@@ -3885,7 +3924,7 @@
       </p:sp>
       <p:sp>
         <p:nvSpPr>
-          <p:cNvPr id="12" name="Text 8"/>
+          <p:cNvPr id="13" name="Text 9"/>
           <p:cNvSpPr txBox="1"/>
           <p:nvPr/>
         </p:nvSpPr>
@@ -3924,7 +3963,7 @@
       </p:sp>
       <p:sp>
         <p:nvSpPr>
-          <p:cNvPr id="13" name="Text 9"/>
+          <p:cNvPr id="14" name="Text 10"/>
           <p:cNvSpPr txBox="1"/>
           <p:nvPr/>
         </p:nvSpPr>
